--- a/lectures/05/Взаимная блокировка.pptx
+++ b/lectures/05/Взаимная блокировка.pptx
@@ -945,6 +945,10 @@
               <a:rPr lang="ru-RU" dirty="0"/>
               <a:t>Здесь мы реализуем решение с «официантом» — внешним координатором.</a:t>
             </a:r>
+            <a:endParaRPr lang="en-US" dirty="0"/>
+          </a:p>
+          <a:p>
+            <a:endParaRPr lang="ru-RU" dirty="0"/>
           </a:p>
           <a:p>
             <a:r>
@@ -3488,6 +3492,10 @@
               <a:rPr lang="ru-RU" dirty="0"/>
               <a:t> — это не случайная ошибка, а следствие вполне конкретной структуры зависимостей.</a:t>
             </a:r>
+            <a:endParaRPr lang="en-US" dirty="0"/>
+          </a:p>
+          <a:p>
+            <a:endParaRPr lang="ru-RU" dirty="0"/>
           </a:p>
           <a:p>
             <a:r>
@@ -3509,12 +3517,19 @@
               <a:rPr lang="ru-RU" dirty="0"/>
               <a:t> невозможен.</a:t>
             </a:r>
+            <a:endParaRPr lang="en-US" dirty="0"/>
+          </a:p>
+          <a:p>
+            <a:endParaRPr lang="ru-RU" dirty="0"/>
           </a:p>
           <a:p>
             <a:r>
               <a:rPr lang="ru-RU" dirty="0"/>
               <a:t>Поэтому основная инженерная задача — либо не допускать циклов, либо выявлять их как можно раньше.</a:t>
             </a:r>
+          </a:p>
+          <a:p>
+            <a:endParaRPr lang="en-US" dirty="0"/>
           </a:p>
           <a:p>
             <a:r>
@@ -3626,6 +3641,10 @@
               <a:rPr lang="ru-RU" dirty="0"/>
               <a:t>Кажется, что всё просто: добавили блокировки — и программа стала безопасной.</a:t>
             </a:r>
+            <a:endParaRPr lang="en-US" dirty="0"/>
+          </a:p>
+          <a:p>
+            <a:endParaRPr lang="ru-RU" dirty="0"/>
           </a:p>
           <a:p>
             <a:r>
@@ -3654,28 +3673,37 @@
               <a:rPr lang="ru-RU" dirty="0"/>
               <a:t>.</a:t>
             </a:r>
+            <a:endParaRPr lang="en-US" dirty="0"/>
+          </a:p>
+          <a:p>
+            <a:endParaRPr lang="ru-RU" dirty="0"/>
           </a:p>
           <a:p>
             <a:r>
               <a:rPr lang="ru-RU" dirty="0"/>
               <a:t>Это ситуация, когда потоки не падают, не выбрасывают исключения, не завершаются с ошибкой —</a:t>
             </a:r>
-            <a:br>
-              <a:rPr lang="ru-RU" dirty="0"/>
-            </a:br>
+            <a:r>
+              <a:rPr lang="en-US" dirty="0"/>
+              <a:t> </a:t>
+            </a:r>
             <a:r>
               <a:rPr lang="ru-RU" dirty="0"/>
               <a:t>они просто навсегда останавливаются.</a:t>
             </a:r>
           </a:p>
           <a:p>
+            <a:endParaRPr lang="en-US" dirty="0"/>
+          </a:p>
+          <a:p>
             <a:r>
               <a:rPr lang="ru-RU" dirty="0"/>
               <a:t>Программа продолжает работать, процесс жив, CPU почти не загружен —</a:t>
             </a:r>
-            <a:br>
-              <a:rPr lang="ru-RU" dirty="0"/>
-            </a:br>
+            <a:r>
+              <a:rPr lang="en-US" dirty="0"/>
+              <a:t> </a:t>
+            </a:r>
             <a:r>
               <a:rPr lang="ru-RU" dirty="0"/>
               <a:t>но прогресса больше нет.</a:t>
@@ -3740,6 +3768,9 @@
             </a:r>
           </a:p>
           <a:p>
+            <a:endParaRPr lang="en-US" dirty="0"/>
+          </a:p>
+          <a:p>
             <a:r>
               <a:rPr lang="ru-RU" dirty="0"/>
               <a:t>Сегодня мы разберём:</a:t>
@@ -3782,6 +3813,9 @@
               <a:rPr lang="ru-RU" dirty="0"/>
               <a:t>и какие инженерные приёмы позволяют его избежать.</a:t>
             </a:r>
+          </a:p>
+          <a:p>
+            <a:endParaRPr lang="en-US" dirty="0"/>
           </a:p>
           <a:p>
             <a:r>
@@ -4844,16 +4878,18 @@
               <a:rPr lang="ru-RU" dirty="0"/>
               <a:t>Важно понимать:</a:t>
             </a:r>
-            <a:br>
-              <a:rPr lang="ru-RU" dirty="0"/>
-            </a:br>
+            <a:r>
+              <a:rPr lang="en-US" dirty="0"/>
+              <a:t> </a:t>
+            </a:r>
             <a:r>
               <a:rPr lang="ru-RU" dirty="0"/>
               <a:t>программа не падает, не выбрасывает исключения.</a:t>
             </a:r>
-            <a:br>
-              <a:rPr lang="ru-RU" dirty="0"/>
-            </a:br>
+            <a:r>
+              <a:rPr lang="en-US" dirty="0"/>
+              <a:t> </a:t>
+            </a:r>
             <a:r>
               <a:rPr lang="ru-RU" dirty="0"/>
               <a:t>Она просто перестаёт делать полезную работу.</a:t>
@@ -4923,6 +4959,9 @@
               <a:rPr lang="ru-RU" dirty="0"/>
               <a:t>И четвёртое — циклическое ожидание. Возникает цикл: поток A ждёт ресурс у B, B ждёт у C, а C — у A.</a:t>
             </a:r>
+          </a:p>
+          <a:p>
+            <a:endParaRPr lang="en-US" dirty="0"/>
           </a:p>
           <a:p>
             <a:r>
@@ -5263,8 +5302,10 @@
               <a:rPr lang="ru-RU" dirty="0"/>
               <a:t> и допускает, что реализация может:</a:t>
             </a:r>
-          </a:p>
-          <a:p>
+            <a:r>
+              <a:rPr lang="en-US" dirty="0"/>
+              <a:t> </a:t>
+            </a:r>
             <a:r>
               <a:rPr lang="ru-RU" dirty="0"/>
               <a:t>либо реально зависнуть, либо выбросить </a:t>
@@ -5349,9 +5390,13 @@
               <a:rPr lang="ru-RU" dirty="0"/>
               <a:t>Первый — нужно чётко понимать, какие примитивы вы используете.</a:t>
             </a:r>
-            <a:br>
-              <a:rPr lang="ru-RU" dirty="0"/>
-            </a:br>
+            <a:endParaRPr lang="en-US" dirty="0"/>
+          </a:p>
+          <a:p>
+            <a:pPr marL="171450" indent="-171450">
+              <a:buFont typeface="Arial" panose="020B0604020202020204" pitchFamily="34" charset="0"/>
+              <a:buChar char="•"/>
+            </a:pPr>
             <a:r>
               <a:rPr lang="ru-RU" dirty="0"/>
               <a:t>Второй — повторный захват мьютекса почти всегда является логической ошибкой проектирования.</a:t>
@@ -5492,6 +5537,10 @@
               <a:rPr lang="ru-RU" dirty="0"/>
               <a:t>Это классическая задача, иллюстрирующая проблемы синхронизации.</a:t>
             </a:r>
+            <a:endParaRPr lang="en-US" dirty="0"/>
+          </a:p>
+          <a:p>
+            <a:endParaRPr lang="ru-RU" dirty="0"/>
           </a:p>
           <a:p>
             <a:r>
@@ -9159,7 +9208,7 @@
           <a:lstStyle/>
           <a:p>
             <a:r>
-              <a:rPr lang="en-US"/>
+              <a:rPr lang="en-US" dirty="0"/>
               <a:t>Deadlock</a:t>
             </a:r>
           </a:p>

--- a/lectures/05/Взаимная блокировка.pptx
+++ b/lectures/05/Взаимная блокировка.pptx
@@ -257,7 +257,7 @@
           <a:p>
             <a:fld id="{FED81A67-A27B-4083-940C-241E42A8E894}" type="datetimeFigureOut">
               <a:rPr lang="en-US" smtClean="0"/>
-              <a:t>2/27/2026</a:t>
+              <a:t>3/18/2026</a:t>
             </a:fld>
             <a:endParaRPr lang="en-US"/>
           </a:p>
@@ -6083,7 +6083,7 @@
           <a:p>
             <a:fld id="{93C95F23-F574-4C00-9B25-D94C8E69B068}" type="datetimeFigureOut">
               <a:rPr lang="en-US" smtClean="0"/>
-              <a:t>2/27/2026</a:t>
+              <a:t>3/18/2026</a:t>
             </a:fld>
             <a:endParaRPr lang="en-US"/>
           </a:p>
@@ -6281,7 +6281,7 @@
           <a:p>
             <a:fld id="{93C95F23-F574-4C00-9B25-D94C8E69B068}" type="datetimeFigureOut">
               <a:rPr lang="en-US" smtClean="0"/>
-              <a:t>2/27/2026</a:t>
+              <a:t>3/18/2026</a:t>
             </a:fld>
             <a:endParaRPr lang="en-US"/>
           </a:p>
@@ -6489,7 +6489,7 @@
           <a:p>
             <a:fld id="{93C95F23-F574-4C00-9B25-D94C8E69B068}" type="datetimeFigureOut">
               <a:rPr lang="en-US" smtClean="0"/>
-              <a:t>2/27/2026</a:t>
+              <a:t>3/18/2026</a:t>
             </a:fld>
             <a:endParaRPr lang="en-US"/>
           </a:p>
@@ -6687,7 +6687,7 @@
           <a:p>
             <a:fld id="{93C95F23-F574-4C00-9B25-D94C8E69B068}" type="datetimeFigureOut">
               <a:rPr lang="en-US" smtClean="0"/>
-              <a:t>2/27/2026</a:t>
+              <a:t>3/18/2026</a:t>
             </a:fld>
             <a:endParaRPr lang="en-US"/>
           </a:p>
@@ -6962,7 +6962,7 @@
           <a:p>
             <a:fld id="{93C95F23-F574-4C00-9B25-D94C8E69B068}" type="datetimeFigureOut">
               <a:rPr lang="en-US" smtClean="0"/>
-              <a:t>2/27/2026</a:t>
+              <a:t>3/18/2026</a:t>
             </a:fld>
             <a:endParaRPr lang="en-US"/>
           </a:p>
@@ -7227,7 +7227,7 @@
           <a:p>
             <a:fld id="{93C95F23-F574-4C00-9B25-D94C8E69B068}" type="datetimeFigureOut">
               <a:rPr lang="en-US" smtClean="0"/>
-              <a:t>2/27/2026</a:t>
+              <a:t>3/18/2026</a:t>
             </a:fld>
             <a:endParaRPr lang="en-US"/>
           </a:p>
@@ -7639,7 +7639,7 @@
           <a:p>
             <a:fld id="{93C95F23-F574-4C00-9B25-D94C8E69B068}" type="datetimeFigureOut">
               <a:rPr lang="en-US" smtClean="0"/>
-              <a:t>2/27/2026</a:t>
+              <a:t>3/18/2026</a:t>
             </a:fld>
             <a:endParaRPr lang="en-US"/>
           </a:p>
@@ -7780,7 +7780,7 @@
           <a:p>
             <a:fld id="{93C95F23-F574-4C00-9B25-D94C8E69B068}" type="datetimeFigureOut">
               <a:rPr lang="en-US" smtClean="0"/>
-              <a:t>2/27/2026</a:t>
+              <a:t>3/18/2026</a:t>
             </a:fld>
             <a:endParaRPr lang="en-US"/>
           </a:p>
@@ -7893,7 +7893,7 @@
           <a:p>
             <a:fld id="{93C95F23-F574-4C00-9B25-D94C8E69B068}" type="datetimeFigureOut">
               <a:rPr lang="en-US" smtClean="0"/>
-              <a:t>2/27/2026</a:t>
+              <a:t>3/18/2026</a:t>
             </a:fld>
             <a:endParaRPr lang="en-US"/>
           </a:p>
@@ -8204,7 +8204,7 @@
           <a:p>
             <a:fld id="{93C95F23-F574-4C00-9B25-D94C8E69B068}" type="datetimeFigureOut">
               <a:rPr lang="en-US" smtClean="0"/>
-              <a:t>2/27/2026</a:t>
+              <a:t>3/18/2026</a:t>
             </a:fld>
             <a:endParaRPr lang="en-US"/>
           </a:p>
@@ -8492,7 +8492,7 @@
           <a:p>
             <a:fld id="{93C95F23-F574-4C00-9B25-D94C8E69B068}" type="datetimeFigureOut">
               <a:rPr lang="en-US" smtClean="0"/>
-              <a:t>2/27/2026</a:t>
+              <a:t>3/18/2026</a:t>
             </a:fld>
             <a:endParaRPr lang="en-US"/>
           </a:p>
@@ -8733,7 +8733,7 @@
           <a:p>
             <a:fld id="{93C95F23-F574-4C00-9B25-D94C8E69B068}" type="datetimeFigureOut">
               <a:rPr lang="en-US" smtClean="0"/>
-              <a:t>2/27/2026</a:t>
+              <a:t>3/18/2026</a:t>
             </a:fld>
             <a:endParaRPr lang="en-US"/>
           </a:p>
